--- a/Baja tension - Hackaton (tecnico).pptx
+++ b/Baja tension - Hackaton (tecnico).pptx
@@ -12839,7 +12839,7 @@
                 <a:cs typeface="Plus Jakarta Sans"/>
                 <a:sym typeface="Plus Jakarta Sans"/>
               </a:rPr>
-              <a:t>Alerta a la placa del familiar (ESP-NOW)</a:t>
+              <a:t>Puntajes y alerta en la placa: sin PC</a:t>
             </a:r>
           </a:p>
           <a:p>
@@ -12865,7 +12865,7 @@
                 <a:cs typeface="Plus Jakarta Sans"/>
                 <a:sym typeface="Plus Jakarta Sans"/>
               </a:rPr>
-              <a:t>Pregunta por voz “¿Estás bien?”</a:t>
+              <a:t>Alerta a la placa del familiar (ESP-NOW)</a:t>
             </a:r>
           </a:p>
           <a:p>
@@ -17538,7 +17538,7 @@
                 <a:cs typeface="Plus Jakarta Sans"/>
                 <a:sym typeface="Plus Jakarta Sans"/>
               </a:rPr>
-              <a:t>ARQUITECTURA EN EL DISPOSITIVO</a:t>
+              <a:t>ARQUITECTURA DEL PROTOTIPO</a:t>
             </a:r>
           </a:p>
         </p:txBody>
@@ -17581,7 +17581,7 @@
                 <a:cs typeface="Plus Jakarta Sans"/>
                 <a:sym typeface="Plus Jakarta Sans"/>
               </a:rPr>
-              <a:t>Del dato a la </a:t>
+              <a:t>La placa </a:t>
             </a:r>
             <a:r>
               <a:rPr lang="es-AR" sz="3450" b="1">
@@ -17593,7 +17593,7 @@
                 <a:cs typeface="Plus Jakarta Sans"/>
                 <a:sym typeface="Plus Jakarta Sans"/>
               </a:rPr>
-              <a:t>alerta</a:t>
+              <a:t>mide</a:t>
             </a:r>
             <a:r>
               <a:rPr lang="es-AR" sz="3450" b="1">
@@ -17605,7 +17605,19 @@
                 <a:cs typeface="Plus Jakarta Sans"/>
                 <a:sym typeface="Plus Jakarta Sans"/>
               </a:rPr>
-              <a:t>: todo corre en el ESP32</a:t>
+              <a:t>, la PC </a:t>
+            </a:r>
+            <a:r>
+              <a:rPr lang="es-AR" sz="3450" b="1">
+                <a:solidFill>
+                  <a:schemeClr val="accent6"/>
+                </a:solidFill>
+                <a:latin typeface="Plus Jakarta Sans"/>
+                <a:ea typeface="Plus Jakarta Sans"/>
+                <a:cs typeface="Plus Jakarta Sans"/>
+                <a:sym typeface="Plus Jakarta Sans"/>
+              </a:rPr>
+              <a:t>interpreta</a:t>
             </a:r>
           </a:p>
         </p:txBody>
@@ -17645,7 +17657,7 @@
                 <a:cs typeface="Plus Jakarta Sans"/>
                 <a:sym typeface="Plus Jakarta Sans"/>
               </a:rPr>
-              <a:t>Un detector en C puro procesa cada paquete en la placa receptora: sin cámara, sin wearables y sin depender de una PC.</a:t>
+              <a:t>La placa receptora se calibra y envía cada paquete por USB; la PC calcula los puntajes y los muestra en vivo.</a:t>
             </a:r>
           </a:p>
         </p:txBody>
@@ -17806,7 +17818,7 @@
                 <a:cs typeface="Plus Jakarta Sans"/>
                 <a:sym typeface="Plus Jakarta Sans"/>
               </a:rPr>
-              <a:t>10 s con la habitación vacía: guarda la huella del ambiente (mediana y ruido de cada subportadora).</a:t>
+              <a:t>En la placa: 10 s quieto + 10 s caminando. Guarda el promedio de cada subportadora en flash; K1 recalibra.</a:t>
             </a:r>
           </a:p>
         </p:txBody>
@@ -17947,7 +17959,7 @@
                 <a:cs typeface="Plus Jakarta Sans"/>
                 <a:sym typeface="Plus Jakarta Sans"/>
               </a:rPr>
-              <a:t>Puntajes en σ</a:t>
+              <a:t>Transmisión</a:t>
             </a:r>
           </a:p>
         </p:txBody>
@@ -17981,60 +17993,16 @@
               <a:buNone/>
             </a:pPr>
             <a:r>
-              <a:rPr lang="es-AR" sz="1200" b="1">
-                <a:solidFill>
-                  <a:srgbClr val="D32F2F"/>
+              <a:rPr lang="es-AR" sz="1200">
+                <a:solidFill>
+                  <a:srgbClr val="5C4D3C"/>
                 </a:solidFill>
                 <a:latin typeface="Plus Jakarta Sans"/>
                 <a:ea typeface="Plus Jakarta Sans"/>
                 <a:cs typeface="Plus Jakarta Sans"/>
                 <a:sym typeface="Plus Jakarta Sans"/>
               </a:rPr>
-              <a:t>Motion: </a:t>
-            </a:r>
-            <a:r>
-              <a:rPr lang="es-AR" sz="1200">
-                <a:solidFill>
-                  <a:srgbClr val="5C4D3C"/>
-                </a:solidFill>
-                <a:latin typeface="Plus Jakarta Sans"/>
-                <a:ea typeface="Plus Jakarta Sans"/>
-                <a:cs typeface="Plus Jakarta Sans"/>
-                <a:sym typeface="Plus Jakarta Sans"/>
-              </a:rPr>
-              <a:t>cuánto fluctúa la señal en 0,5 s.</a:t>
-            </a:r>
-          </a:p>
-          <a:p>
-            <a:pPr algn="l">
-              <a:lnSpc>
-                <a:spcPct val="130000"/>
-              </a:lnSpc>
-              <a:buNone/>
-            </a:pPr>
-            <a:r>
-              <a:rPr lang="es-AR" sz="1200" b="1">
-                <a:solidFill>
-                  <a:srgbClr val="1976D2"/>
-                </a:solidFill>
-                <a:latin typeface="Plus Jakarta Sans"/>
-                <a:ea typeface="Plus Jakarta Sans"/>
-                <a:cs typeface="Plus Jakarta Sans"/>
-                <a:sym typeface="Plus Jakarta Sans"/>
-              </a:rPr>
-              <a:t>Presence: </a:t>
-            </a:r>
-            <a:r>
-              <a:rPr lang="es-AR" sz="1200">
-                <a:solidFill>
-                  <a:srgbClr val="5C4D3C"/>
-                </a:solidFill>
-                <a:latin typeface="Plus Jakarta Sans"/>
-                <a:ea typeface="Plus Jakarta Sans"/>
-                <a:cs typeface="Plus Jakarta Sans"/>
-                <a:sym typeface="Plus Jakarta Sans"/>
-              </a:rPr>
-              <a:t>cuánto difiere del cuarto vacío. Ambos en múltiplos del ruido base.</a:t>
+              <a:t>~100 paquetes/s por USB: la amplitud de 52 subportadoras más los promedios de calibración.</a:t>
             </a:r>
           </a:p>
         </p:txBody>
@@ -18175,7 +18143,7 @@
                 <a:cs typeface="Plus Jakarta Sans"/>
                 <a:sym typeface="Plus Jakarta Sans"/>
               </a:rPr>
-              <a:t>Estados</a:t>
+              <a:t>Puntajes en σ</a:t>
             </a:r>
           </a:p>
         </p:txBody>
@@ -18211,14 +18179,26 @@
             <a:r>
               <a:rPr lang="es-AR" sz="1200" b="1">
                 <a:solidFill>
-                  <a:srgbClr val="5C4D3C"/>
+                  <a:srgbClr val="D32F2F"/>
                 </a:solidFill>
                 <a:latin typeface="Plus Jakarta Sans"/>
                 <a:ea typeface="Plus Jakarta Sans"/>
                 <a:cs typeface="Plus Jakarta Sans"/>
                 <a:sym typeface="Plus Jakarta Sans"/>
               </a:rPr>
-              <a:t>VACÍO → MOVIMIENTO → QUIETO</a:t>
+              <a:t>Motion: </a:t>
+            </a:r>
+            <a:r>
+              <a:rPr lang="es-AR" sz="1200">
+                <a:solidFill>
+                  <a:srgbClr val="5C4D3C"/>
+                </a:solidFill>
+                <a:latin typeface="Plus Jakarta Sans"/>
+                <a:ea typeface="Plus Jakarta Sans"/>
+                <a:cs typeface="Plus Jakarta Sans"/>
+                <a:sym typeface="Plus Jakarta Sans"/>
+              </a:rPr>
+              <a:t>cuánto fluctúa la señal en 0,5 s.</a:t>
             </a:r>
           </a:p>
           <a:p>
@@ -18229,40 +18209,28 @@
               <a:buNone/>
             </a:pPr>
             <a:r>
-              <a:rPr lang="es-AR" sz="1200">
-                <a:solidFill>
-                  <a:srgbClr val="5C4D3C"/>
+              <a:rPr lang="es-AR" sz="1200" b="1">
+                <a:solidFill>
+                  <a:srgbClr val="1976D2"/>
                 </a:solidFill>
                 <a:latin typeface="Plus Jakarta Sans"/>
                 <a:ea typeface="Plus Jakarta Sans"/>
                 <a:cs typeface="Plus Jakarta Sans"/>
                 <a:sym typeface="Plus Jakarta Sans"/>
               </a:rPr>
-              <a:t>Si alguien queda quieto más de 20 s, pasa a </a:t>
+              <a:t>Presence: </a:t>
             </a:r>
             <a:r>
-              <a:rPr lang="es-AR" sz="1200" b="1">
-                <a:solidFill>
-                  <a:srgbClr val="D32F2F"/>
+              <a:rPr lang="es-AR" sz="1200">
+                <a:solidFill>
+                  <a:srgbClr val="5C4D3C"/>
                 </a:solidFill>
                 <a:latin typeface="Plus Jakarta Sans"/>
                 <a:ea typeface="Plus Jakarta Sans"/>
                 <a:cs typeface="Plus Jakarta Sans"/>
                 <a:sym typeface="Plus Jakarta Sans"/>
               </a:rPr>
-              <a:t>ALERTA</a:t>
-            </a:r>
-            <a:r>
-              <a:rPr lang="es-AR" sz="1200">
-                <a:solidFill>
-                  <a:srgbClr val="5C4D3C"/>
-                </a:solidFill>
-                <a:latin typeface="Plus Jakarta Sans"/>
-                <a:ea typeface="Plus Jakarta Sans"/>
-                <a:cs typeface="Plus Jakarta Sans"/>
-                <a:sym typeface="Plus Jakarta Sans"/>
-              </a:rPr>
-              <a:t>.</a:t>
+              <a:t>cuánto difiere del cuarto vacío. Ambos en múltiplos del ruido base.</a:t>
             </a:r>
           </a:p>
         </p:txBody>
@@ -18403,7 +18371,7 @@
                 <a:cs typeface="Plus Jakarta Sans"/>
                 <a:sym typeface="Plus Jakarta Sans"/>
               </a:rPr>
-              <a:t>Verificación</a:t>
+              <a:t>Visualización</a:t>
             </a:r>
           </a:p>
         </p:txBody>
@@ -18446,7 +18414,7 @@
                 <a:cs typeface="Plus Jakarta Sans"/>
                 <a:sym typeface="Plus Jakarta Sans"/>
               </a:rPr>
-              <a:t>La pantalla pregunta “Are you OK?”. El botón K2 la cancela; sin respuesta, la alerta sigue activa.</a:t>
+              <a:t>Mapa de calor en vivo, puntajes y marcas de eventos (caída, sentarse…) para grabar y analizar.</a:t>
             </a:r>
           </a:p>
         </p:txBody>
@@ -21121,7 +21089,7 @@
                 <a:cs typeface="Plus Jakarta Sans"/>
                 <a:sym typeface="Plus Jakarta Sans"/>
               </a:rPr>
-              <a:t>Distancia, altura y objetos alteran la escala. CMU, con 9 pares de antenas, cae de 43,5 a 27,3 AP en un cuarto nuevo.</a:t>
+              <a:t>Cambian con distancia y objetos. Hasta CMU baja de 43,5 a 27,3 AP en otro cuarto.</a:t>
             </a:r>
           </a:p>
         </p:txBody>
@@ -21349,7 +21317,7 @@
                 <a:cs typeface="Plus Jakarta Sans"/>
                 <a:sym typeface="Plus Jakarta Sans"/>
               </a:rPr>
-              <a:t>detectar la inmovilidad después del evento (no la caída en sí), preguntar “¿Estás bien?” y calibrar en cada habitación.</a:t>
+              <a:t>buscar la inmovilidad después del evento (no la caída en sí) y calibrar en cada habitación, antes de alertar.</a:t>
             </a:r>
           </a:p>
         </p:txBody>
